--- a/docs/Praesentationen/EvalPro_Präsentation_Florian_Tewes.pptx
+++ b/docs/Praesentationen/EvalPro_Präsentation_Florian_Tewes.pptx
@@ -5,10 +5,10 @@
     <p:sldMasterId id="2147483660" r:id="rId1"/>
   </p:sldMasterIdLst>
   <p:notesMasterIdLst>
-    <p:notesMasterId r:id="rId11"/>
+    <p:notesMasterId r:id="rId14"/>
   </p:notesMasterIdLst>
   <p:handoutMasterIdLst>
-    <p:handoutMasterId r:id="rId12"/>
+    <p:handoutMasterId r:id="rId15"/>
   </p:handoutMasterIdLst>
   <p:sldIdLst>
     <p:sldId id="256" r:id="rId2"/>
@@ -20,6 +20,9 @@
     <p:sldId id="262" r:id="rId8"/>
     <p:sldId id="263" r:id="rId9"/>
     <p:sldId id="264" r:id="rId10"/>
+    <p:sldId id="267" r:id="rId11"/>
+    <p:sldId id="265" r:id="rId12"/>
+    <p:sldId id="266" r:id="rId13"/>
   </p:sldIdLst>
   <p:sldSz cx="12192000" cy="6858000"/>
   <p:notesSz cx="6858000" cy="9144000"/>
@@ -220,7 +223,7 @@
           <a:p>
             <a:fld id="{ABC5061B-50EC-44A2-ADF9-08F30454A127}" type="datetimeFigureOut">
               <a:rPr lang="en-DE" smtClean="0"/>
-              <a:t>25/02/2026</a:t>
+              <a:t>27/02/2026</a:t>
             </a:fld>
             <a:endParaRPr lang="en-DE"/>
           </a:p>
@@ -398,7 +401,7 @@
           <a:p>
             <a:fld id="{8BFC536B-7B34-4219-AE64-4C6AA0C6C9E8}" type="datetimeFigureOut">
               <a:rPr lang="en-DE" smtClean="0"/>
-              <a:t>25/02/2026</a:t>
+              <a:t>27/02/2026</a:t>
             </a:fld>
             <a:endParaRPr lang="en-DE"/>
           </a:p>
@@ -3504,6 +3507,275 @@
 </p:sld>
 </file>
 
+<file path=ppt/slides/slide10.xml><?xml version="1.0" encoding="utf-8"?>
+<p:sld xmlns:a="http://schemas.openxmlformats.org/drawingml/2006/main" xmlns:r="http://schemas.openxmlformats.org/officeDocument/2006/relationships" xmlns:p="http://schemas.openxmlformats.org/presentationml/2006/main">
+  <p:cSld>
+    <p:spTree>
+      <p:nvGrpSpPr>
+        <p:cNvPr id="1" name=""/>
+        <p:cNvGrpSpPr/>
+        <p:nvPr/>
+      </p:nvGrpSpPr>
+      <p:grpSpPr>
+        <a:xfrm>
+          <a:off x="0" y="0"/>
+          <a:ext cx="0" cy="0"/>
+          <a:chOff x="0" y="0"/>
+          <a:chExt cx="0" cy="0"/>
+        </a:xfrm>
+      </p:grpSpPr>
+      <p:sp>
+        <p:nvSpPr>
+          <p:cNvPr id="2" name="Titel 1">
+            <a:extLst>
+              <a:ext uri="{FF2B5EF4-FFF2-40B4-BE49-F238E27FC236}">
+                <a16:creationId xmlns:a16="http://schemas.microsoft.com/office/drawing/2014/main" id="{4A5FC893-7D53-0499-F417-358DDAD684F8}"/>
+              </a:ext>
+            </a:extLst>
+          </p:cNvPr>
+          <p:cNvSpPr>
+            <a:spLocks noGrp="1"/>
+          </p:cNvSpPr>
+          <p:nvPr>
+            <p:ph type="title"/>
+          </p:nvPr>
+        </p:nvSpPr>
+        <p:spPr/>
+        <p:txBody>
+          <a:bodyPr/>
+          <a:lstStyle/>
+          <a:p>
+            <a:r>
+              <a:rPr lang="de-DE" dirty="0"/>
+              <a:t>2. Aktueller Stand</a:t>
+            </a:r>
+            <a:endParaRPr lang="en-DE" dirty="0"/>
+          </a:p>
+        </p:txBody>
+      </p:sp>
+      <p:pic>
+        <p:nvPicPr>
+          <p:cNvPr id="5" name="Inhaltsplatzhalter 4" descr="Ein Bild, das Text, Screenshot, Schrift enthält.">
+            <a:extLst>
+              <a:ext uri="{FF2B5EF4-FFF2-40B4-BE49-F238E27FC236}">
+                <a16:creationId xmlns:a16="http://schemas.microsoft.com/office/drawing/2014/main" id="{1B60D86E-9398-7FBA-B0FB-AA834C4AE10A}"/>
+              </a:ext>
+            </a:extLst>
+          </p:cNvPr>
+          <p:cNvPicPr>
+            <a:picLocks noGrp="1" noChangeAspect="1"/>
+          </p:cNvPicPr>
+          <p:nvPr>
+            <p:ph idx="1"/>
+          </p:nvPr>
+        </p:nvPicPr>
+        <p:blipFill>
+          <a:blip r:embed="rId2"/>
+          <a:stretch>
+            <a:fillRect/>
+          </a:stretch>
+        </p:blipFill>
+        <p:spPr>
+          <a:xfrm>
+            <a:off x="1518598" y="1690688"/>
+            <a:ext cx="9154803" cy="3820058"/>
+          </a:xfrm>
+          <a:prstGeom prst="rect">
+            <a:avLst/>
+          </a:prstGeom>
+        </p:spPr>
+      </p:pic>
+    </p:spTree>
+    <p:extLst>
+      <p:ext uri="{BB962C8B-B14F-4D97-AF65-F5344CB8AC3E}">
+        <p14:creationId xmlns:p14="http://schemas.microsoft.com/office/powerpoint/2010/main" val="2437468944"/>
+      </p:ext>
+    </p:extLst>
+  </p:cSld>
+  <p:clrMapOvr>
+    <a:masterClrMapping/>
+  </p:clrMapOvr>
+</p:sld>
+</file>
+
+<file path=ppt/slides/slide11.xml><?xml version="1.0" encoding="utf-8"?>
+<p:sld xmlns:a="http://schemas.openxmlformats.org/drawingml/2006/main" xmlns:r="http://schemas.openxmlformats.org/officeDocument/2006/relationships" xmlns:p="http://schemas.openxmlformats.org/presentationml/2006/main">
+  <p:cSld>
+    <p:spTree>
+      <p:nvGrpSpPr>
+        <p:cNvPr id="1" name=""/>
+        <p:cNvGrpSpPr/>
+        <p:nvPr/>
+      </p:nvGrpSpPr>
+      <p:grpSpPr>
+        <a:xfrm>
+          <a:off x="0" y="0"/>
+          <a:ext cx="0" cy="0"/>
+          <a:chOff x="0" y="0"/>
+          <a:chExt cx="0" cy="0"/>
+        </a:xfrm>
+      </p:grpSpPr>
+      <p:sp>
+        <p:nvSpPr>
+          <p:cNvPr id="2" name="Titel 1">
+            <a:extLst>
+              <a:ext uri="{FF2B5EF4-FFF2-40B4-BE49-F238E27FC236}">
+                <a16:creationId xmlns:a16="http://schemas.microsoft.com/office/drawing/2014/main" id="{3E0BD8F5-378F-D43F-279B-4F087FD733BE}"/>
+              </a:ext>
+            </a:extLst>
+          </p:cNvPr>
+          <p:cNvSpPr>
+            <a:spLocks noGrp="1"/>
+          </p:cNvSpPr>
+          <p:nvPr>
+            <p:ph type="title"/>
+          </p:nvPr>
+        </p:nvSpPr>
+        <p:spPr/>
+        <p:txBody>
+          <a:bodyPr/>
+          <a:lstStyle/>
+          <a:p>
+            <a:r>
+              <a:rPr lang="de-DE" dirty="0"/>
+              <a:t>3. Reflektion</a:t>
+            </a:r>
+            <a:endParaRPr lang="en-DE" dirty="0"/>
+          </a:p>
+        </p:txBody>
+      </p:sp>
+      <p:sp>
+        <p:nvSpPr>
+          <p:cNvPr id="3" name="Textplatzhalter 2">
+            <a:extLst>
+              <a:ext uri="{FF2B5EF4-FFF2-40B4-BE49-F238E27FC236}">
+                <a16:creationId xmlns:a16="http://schemas.microsoft.com/office/drawing/2014/main" id="{DF9D4505-9B3E-EFE8-45A7-885FCA0B2374}"/>
+              </a:ext>
+            </a:extLst>
+          </p:cNvPr>
+          <p:cNvSpPr>
+            <a:spLocks noGrp="1"/>
+          </p:cNvSpPr>
+          <p:nvPr>
+            <p:ph type="body" idx="1"/>
+          </p:nvPr>
+        </p:nvSpPr>
+        <p:spPr/>
+        <p:txBody>
+          <a:bodyPr/>
+          <a:lstStyle/>
+          <a:p>
+            <a:endParaRPr lang="en-DE"/>
+          </a:p>
+        </p:txBody>
+      </p:sp>
+    </p:spTree>
+    <p:extLst>
+      <p:ext uri="{BB962C8B-B14F-4D97-AF65-F5344CB8AC3E}">
+        <p14:creationId xmlns:p14="http://schemas.microsoft.com/office/powerpoint/2010/main" val="1704404679"/>
+      </p:ext>
+    </p:extLst>
+  </p:cSld>
+  <p:clrMapOvr>
+    <a:masterClrMapping/>
+  </p:clrMapOvr>
+</p:sld>
+</file>
+
+<file path=ppt/slides/slide12.xml><?xml version="1.0" encoding="utf-8"?>
+<p:sld xmlns:a="http://schemas.openxmlformats.org/drawingml/2006/main" xmlns:r="http://schemas.openxmlformats.org/officeDocument/2006/relationships" xmlns:p="http://schemas.openxmlformats.org/presentationml/2006/main">
+  <p:cSld>
+    <p:spTree>
+      <p:nvGrpSpPr>
+        <p:cNvPr id="1" name=""/>
+        <p:cNvGrpSpPr/>
+        <p:nvPr/>
+      </p:nvGrpSpPr>
+      <p:grpSpPr>
+        <a:xfrm>
+          <a:off x="0" y="0"/>
+          <a:ext cx="0" cy="0"/>
+          <a:chOff x="0" y="0"/>
+          <a:chExt cx="0" cy="0"/>
+        </a:xfrm>
+      </p:grpSpPr>
+      <p:sp>
+        <p:nvSpPr>
+          <p:cNvPr id="2" name="Titel 1">
+            <a:extLst>
+              <a:ext uri="{FF2B5EF4-FFF2-40B4-BE49-F238E27FC236}">
+                <a16:creationId xmlns:a16="http://schemas.microsoft.com/office/drawing/2014/main" id="{55311C1C-5F20-0167-AEF3-10420DD7BB22}"/>
+              </a:ext>
+            </a:extLst>
+          </p:cNvPr>
+          <p:cNvSpPr>
+            <a:spLocks noGrp="1"/>
+          </p:cNvSpPr>
+          <p:nvPr>
+            <p:ph type="title"/>
+          </p:nvPr>
+        </p:nvSpPr>
+        <p:spPr/>
+        <p:txBody>
+          <a:bodyPr/>
+          <a:lstStyle/>
+          <a:p>
+            <a:r>
+              <a:rPr lang="de-DE" dirty="0"/>
+              <a:t>3.1 Herausforderungen und Hindernisse</a:t>
+            </a:r>
+            <a:endParaRPr lang="en-DE" dirty="0"/>
+          </a:p>
+        </p:txBody>
+      </p:sp>
+      <p:sp>
+        <p:nvSpPr>
+          <p:cNvPr id="3" name="Inhaltsplatzhalter 2">
+            <a:extLst>
+              <a:ext uri="{FF2B5EF4-FFF2-40B4-BE49-F238E27FC236}">
+                <a16:creationId xmlns:a16="http://schemas.microsoft.com/office/drawing/2014/main" id="{1BDA0FFA-093A-2BE9-86B7-009B8271358C}"/>
+              </a:ext>
+            </a:extLst>
+          </p:cNvPr>
+          <p:cNvSpPr>
+            <a:spLocks noGrp="1"/>
+          </p:cNvSpPr>
+          <p:nvPr>
+            <p:ph idx="1"/>
+          </p:nvPr>
+        </p:nvSpPr>
+        <p:spPr/>
+        <p:txBody>
+          <a:bodyPr/>
+          <a:lstStyle/>
+          <a:p>
+            <a:r>
+              <a:rPr lang="de-DE" dirty="0"/>
+              <a:t>Zeitmangel aufgrund von Präsentationen und Krankheit</a:t>
+            </a:r>
+          </a:p>
+          <a:p>
+            <a:r>
+              <a:rPr lang="de-DE" dirty="0"/>
+              <a:t>Fehlende Fachkenntnisse</a:t>
+            </a:r>
+            <a:endParaRPr lang="en-DE" dirty="0"/>
+          </a:p>
+        </p:txBody>
+      </p:sp>
+    </p:spTree>
+    <p:extLst>
+      <p:ext uri="{BB962C8B-B14F-4D97-AF65-F5344CB8AC3E}">
+        <p14:creationId xmlns:p14="http://schemas.microsoft.com/office/powerpoint/2010/main" val="3758145748"/>
+      </p:ext>
+    </p:extLst>
+  </p:cSld>
+  <p:clrMapOvr>
+    <a:masterClrMapping/>
+  </p:clrMapOvr>
+</p:sld>
+</file>
+
 <file path=ppt/slides/slide2.xml><?xml version="1.0" encoding="utf-8"?>
 <p:sld xmlns:a="http://schemas.openxmlformats.org/drawingml/2006/main" xmlns:r="http://schemas.openxmlformats.org/officeDocument/2006/relationships" xmlns:p="http://schemas.openxmlformats.org/presentationml/2006/main">
   <p:cSld>
@@ -3843,10 +4115,9 @@
             </a:r>
           </a:p>
           <a:p>
-            <a:r>
-              <a:rPr lang="de-DE" dirty="0"/>
-              <a:t> </a:t>
-            </a:r>
+            <a:pPr marL="0" indent="0">
+              <a:buNone/>
+            </a:pPr>
             <a:endParaRPr lang="en-DE" dirty="0"/>
           </a:p>
         </p:txBody>
@@ -4094,35 +4365,44 @@
           </a:p>
         </p:txBody>
       </p:sp>
-      <p:sp>
-        <p:nvSpPr>
-          <p:cNvPr id="3" name="Inhaltsplatzhalter 2">
-            <a:extLst>
-              <a:ext uri="{FF2B5EF4-FFF2-40B4-BE49-F238E27FC236}">
-                <a16:creationId xmlns:a16="http://schemas.microsoft.com/office/drawing/2014/main" id="{EEF93FE2-3881-9F56-491D-7728AEE2840B}"/>
-              </a:ext>
-            </a:extLst>
-          </p:cNvPr>
-          <p:cNvSpPr>
-            <a:spLocks noGrp="1"/>
-          </p:cNvSpPr>
+      <p:pic>
+        <p:nvPicPr>
+          <p:cNvPr id="5" name="Inhaltsplatzhalter 4">
+            <a:extLst>
+              <a:ext uri="{FF2B5EF4-FFF2-40B4-BE49-F238E27FC236}">
+                <a16:creationId xmlns:a16="http://schemas.microsoft.com/office/drawing/2014/main" id="{F1A9A067-94A3-C72A-CBE1-2E66244D399E}"/>
+              </a:ext>
+            </a:extLst>
+          </p:cNvPr>
+          <p:cNvPicPr>
+            <a:picLocks noGrp="1" noChangeAspect="1"/>
+          </p:cNvPicPr>
           <p:nvPr>
             <p:ph idx="1"/>
           </p:nvPr>
-        </p:nvSpPr>
-        <p:spPr/>
-        <p:txBody>
-          <a:bodyPr/>
-          <a:lstStyle/>
-          <a:p>
-            <a:r>
-              <a:rPr lang="de-DE" dirty="0"/>
-              <a:t>Nicht komplett fertig</a:t>
-            </a:r>
-            <a:endParaRPr lang="en-DE" dirty="0"/>
-          </a:p>
-        </p:txBody>
-      </p:sp>
+        </p:nvPicPr>
+        <p:blipFill>
+          <a:blip r:embed="rId2">
+            <a:extLst>
+              <a:ext uri="{28A0092B-C50C-407E-A947-70E740481C1C}">
+                <a14:useLocalDpi xmlns:a14="http://schemas.microsoft.com/office/drawing/2010/main" val="0"/>
+              </a:ext>
+            </a:extLst>
+          </a:blip>
+          <a:stretch>
+            <a:fillRect/>
+          </a:stretch>
+        </p:blipFill>
+        <p:spPr>
+          <a:xfrm>
+            <a:off x="2133600" y="1690688"/>
+            <a:ext cx="7445829" cy="4351338"/>
+          </a:xfrm>
+          <a:prstGeom prst="rect">
+            <a:avLst/>
+          </a:prstGeom>
+        </p:spPr>
+      </p:pic>
     </p:spTree>
     <p:extLst>
       <p:ext uri="{BB962C8B-B14F-4D97-AF65-F5344CB8AC3E}">
@@ -4265,35 +4545,46 @@
           <a:bodyPr/>
           <a:lstStyle/>
           <a:p>
-            <a:endParaRPr lang="en-DE"/>
-          </a:p>
-        </p:txBody>
-      </p:sp>
-      <p:sp>
-        <p:nvSpPr>
-          <p:cNvPr id="3" name="Inhaltsplatzhalter 2">
-            <a:extLst>
-              <a:ext uri="{FF2B5EF4-FFF2-40B4-BE49-F238E27FC236}">
-                <a16:creationId xmlns:a16="http://schemas.microsoft.com/office/drawing/2014/main" id="{08275E15-7777-14AA-4072-0B2ED82EBA0B}"/>
-              </a:ext>
-            </a:extLst>
-          </p:cNvPr>
-          <p:cNvSpPr>
-            <a:spLocks noGrp="1"/>
-          </p:cNvSpPr>
+            <a:r>
+              <a:rPr lang="de-DE" dirty="0"/>
+              <a:t>2. Aktueller Stand (Frontend)</a:t>
+            </a:r>
+            <a:endParaRPr lang="en-DE" dirty="0"/>
+          </a:p>
+        </p:txBody>
+      </p:sp>
+      <p:pic>
+        <p:nvPicPr>
+          <p:cNvPr id="5" name="Inhaltsplatzhalter 4" descr="Ein Bild, das Text, Screenshot, Schrift enthält.">
+            <a:extLst>
+              <a:ext uri="{FF2B5EF4-FFF2-40B4-BE49-F238E27FC236}">
+                <a16:creationId xmlns:a16="http://schemas.microsoft.com/office/drawing/2014/main" id="{53CEE1B8-8590-46CA-BD86-6B90F643F4B6}"/>
+              </a:ext>
+            </a:extLst>
+          </p:cNvPr>
+          <p:cNvPicPr>
+            <a:picLocks noGrp="1" noChangeAspect="1"/>
+          </p:cNvPicPr>
           <p:nvPr>
             <p:ph idx="1"/>
           </p:nvPr>
-        </p:nvSpPr>
-        <p:spPr/>
-        <p:txBody>
-          <a:bodyPr/>
-          <a:lstStyle/>
-          <a:p>
-            <a:endParaRPr lang="en-DE"/>
-          </a:p>
-        </p:txBody>
-      </p:sp>
+        </p:nvPicPr>
+        <p:blipFill>
+          <a:blip r:embed="rId2"/>
+          <a:stretch>
+            <a:fillRect/>
+          </a:stretch>
+        </p:blipFill>
+        <p:spPr>
+          <a:xfrm>
+            <a:off x="1471899" y="2185863"/>
+            <a:ext cx="8671336" cy="2486273"/>
+          </a:xfrm>
+          <a:prstGeom prst="rect">
+            <a:avLst/>
+          </a:prstGeom>
+        </p:spPr>
+      </p:pic>
     </p:spTree>
     <p:extLst>
       <p:ext uri="{BB962C8B-B14F-4D97-AF65-F5344CB8AC3E}">
